--- a/ai-case-library/research/ventures/grid-product-deck.pptx
+++ b/ai-case-library/research/ventures/grid-product-deck.pptx
@@ -3569,7 +3569,7 @@
                 <a:ea typeface="Arial" pitchFamily="34" charset="-122"/>
                 <a:cs typeface="Arial" pitchFamily="34" charset="-120"/>
               </a:rPr>
-              <a:t>Проверка по нормам</a:t>
+              <a:t>Проверка норм</a:t>
             </a:r>
             <a:endParaRPr lang="en-US" sz="1600" dirty="0"/>
           </a:p>
@@ -3608,7 +3608,7 @@
                 <a:ea typeface="Arial" pitchFamily="34" charset="-122"/>
                 <a:cs typeface="Arial" pitchFamily="34" charset="-120"/>
               </a:rPr>
-              <a:t>База знаний хранит требования конкретной сетевой компании; замечания — инженеру на решение.</a:t>
+              <a:t>База знаний хранит нормы конкретной сети; замечания — инженеру на решение.</a:t>
             </a:r>
             <a:endParaRPr lang="en-US" sz="1250" dirty="0"/>
           </a:p>

--- a/ai-case-library/research/ventures/grid-product-deck.pptx
+++ b/ai-case-library/research/ventures/grid-product-deck.pptx
@@ -1797,7 +1797,7 @@
       </p:sp>
       <p:pic>
         <p:nvPicPr>
-          <p:cNvPr id="6" name="Image 0" descr="/tmp/claude-0/-home-user/5ac64fc3-708b-5ba2-8575-a96a48f05f03/scratchpad/product/mock.png">    </p:cNvPr>
+          <p:cNvPr id="6" name="Image 0" descr="_product/mock.png">    </p:cNvPr>
           <p:cNvPicPr>
             <a:picLocks noChangeAspect="1"/>
           </p:cNvPicPr>
@@ -4570,7 +4570,7 @@
                 <a:ea typeface="Arial" pitchFamily="34" charset="-122"/>
                 <a:cs typeface="Arial" pitchFamily="34" charset="-120"/>
               </a:rPr>
-              <a:t>Почему сейчас: за инженеров, которые проектируют сети, уже платят миллиарды — WSP купила POWER Engineers (4000 инженеров) за 1,78 млрд $. Гиганты только начали нанимать менеджеров по ИИ (Black &amp; Veatch, август 2026); стартапы ИИ-инжиниринга для дата-центров появились этим летом (Marengo, Vela — YC 2026). В проектировании подключения к сети — пусто. Окно — год-два.</a:t>
+              <a:t>Почему сейчас: за инженеров, которые проектируют сети, уже платят миллиарды — WSP купила POWER Engineers (4000 инженеров) за 1,78 млрд $. Гиганты только начали нанимать менеджеров по ИИ (Black &amp; Veatch, август 2026); стартапы ИИ-инжиниринга для дата-центров появились этим летом (Marengo, Vela — YC 2026). В подключении к сети покупки фирм уже начались (E Source → CF Power, Littlejohn + GDS), но с продуктом, а не с людьми, и в Заливе и Индии — никого. Окно — год-два.</a:t>
             </a:r>
             <a:endParaRPr lang="en-US" sz="1300" dirty="0"/>
           </a:p>
@@ -5316,7 +5316,7 @@
                 <a:ea typeface="Arial" pitchFamily="34" charset="-122"/>
                 <a:cs typeface="Arial" pitchFamily="34" charset="-120"/>
               </a:rPr>
-              <a:t>Почему этап 2 — покупка фирм: продукт даёт долю гонорара, а фирма с продуктом внутри — весь гонорар и в полтора-два раза больше проектов. За такие фирмы стратеги платят по 445 тысяч $ за инженера (WSP → POWER). Это дистрибуция продукта, а не смена бизнеса.</a:t>
+              <a:t>Почему этап 2 — покупка фирм: продукт даёт долю гонорара, а фирма с продуктом внутри — весь гонорар и в полтора-два раза больше проектов. Малые фирмы стоят 5–7 годовых прибылей; 445 тысяч $ за инженера (WSP → POWER) платят за масштаб, не за ИИ. Это дистрибуция продукта, а не смена бизнеса.</a:t>
             </a:r>
             <a:endParaRPr lang="en-US" sz="1300" dirty="0"/>
           </a:p>
@@ -5730,7 +5730,7 @@
                 <a:ea typeface="Arial" pitchFamily="34" charset="-122"/>
                 <a:cs typeface="Arial" pitchFamily="34" charset="-120"/>
               </a:rPr>
-              <a:t>1,78 млрд $ / 4000 сотрудников — WSP → POWER Engineers, 10.2024; 445 тыс. $ за инженера = 1,78 млрд / 4000. Black &amp; Veatch — вакансия 27.08.2026. Marengo, Vela — YC 2026.</a:t>
+              <a:t>1,78 млрд $ / 4000 сотрудников — WSP → POWER Engineers, 10.2024; 445 тыс. $ за инженера = 1,78 млрд / 4000 (группа на 4000 человек); малые фирмы 5,4–7,5× EBITDA — ROG Partners, см. engineering-rollup-passport.md. Black &amp; Veatch — вакансия 27.08.2026. Marengo, Vela — YC 2026.</a:t>
             </a:r>
             <a:endParaRPr lang="en-US" sz="1150" dirty="0"/>
           </a:p>

--- a/ai-case-library/research/ventures/grid-product-deck.pptx
+++ b/ai-case-library/research/ventures/grid-product-deck.pptx
@@ -2868,7 +2868,7 @@
                 <a:ea typeface="Arial" pitchFamily="34" charset="-122"/>
                 <a:cs typeface="Arial" pitchFamily="34" charset="-120"/>
               </a:rPr>
-              <a:t>Где: Персидский залив и Индия — там строят больше всего, инженеров не хватает так же (Саудовская Аравия требует 30% местных инженеров), туда нас пускают. Рынок проектирования сетей только в Саудовской Аравии — порядка 450 млн $ в год; спрос дата-центров на электричество удваивается к 2030.</a:t>
+              <a:t>Где: Персидский залив в первую очередь — там строят больше всего, не хватает проектировщиков с допуском сетевых компаний, Саудовская Аравия требует 30% местных инженеров, и туда нас пускают. Индия — как ресурсная база, а не как рынок сбыта. Рынок проектирования сетей только в Саудовской Аравии — порядка 450 млн $ в год; спрос дата-центров на электричество удваивается к 2030.</a:t>
             </a:r>
             <a:endParaRPr lang="en-US" sz="1300" dirty="0"/>
           </a:p>
